--- a/marketing/decks/AI-Identity-DenAI-Showcase-2026-v4.pptx
+++ b/marketing/decks/AI-Identity-DenAI-Showcase-2026-v4.pptx
@@ -1037,7 +1037,7 @@
           <a:p>
             <a:r>
               <a:rPr lang="en-US" dirty="0"/>
-              <a:t>4:15–4:40 — ACTION REQUIRED: replace the amber card before you submit or present. A named Colorado workflow is the single highest-value edit in this deck. Also decide in advance how you answer 'are you raising?' — the deck deliberately does not claim either way.</a:t>
+              <a:t>4:15–4:40 — The ask, said once and plainly; do not soften it into 'we would love to explore.' Name the three constraints and stop. If someone asks whether a city is already using this, answer straight — the deck claims nothing either way. Decide in advance how you answer 'are you raising?'</a:t>
             </a:r>
             <a:endParaRPr lang="en-US" dirty="0"/>
           </a:p>
@@ -7874,11 +7874,11 @@
         <p:spPr>
           <a:xfrm>
             <a:off x="685800" y="1700784"/>
-            <a:ext cx="5577840" cy="3127248"/>
+            <a:ext cx="10820095" cy="3054096"/>
           </a:xfrm>
           <a:prstGeom prst="roundRect">
             <a:avLst>
-              <a:gd name="adj" fmla="val 1462"/>
+              <a:gd name="adj" fmla="val 1497"/>
             </a:avLst>
           </a:prstGeom>
           <a:solidFill>
@@ -7947,23 +7947,23 @@
         <p:spPr>
           <a:xfrm>
             <a:off x="1069848" y="2304288"/>
-            <a:ext cx="4809744" cy="402336"/>
-          </a:xfrm>
-          <a:prstGeom prst="rect">
-            <a:avLst/>
-          </a:prstGeom>
-          <a:noFill/>
-          <a:ln/>
-        </p:spPr>
-        <p:txBody>
-          <a:bodyPr wrap="square" lIns="0" tIns="0" rIns="0" bIns="0" rtlCol="0" anchor="ctr"/>
-          <a:lstStyle/>
-          <a:p>
-            <a:pPr indent="0" marL="0">
-              <a:buNone/>
-            </a:pPr>
-            <a:r>
-              <a:rPr lang="en-US" sz="2300" b="1" dirty="0">
+            <a:ext cx="7315200" cy="420624"/>
+          </a:xfrm>
+          <a:prstGeom prst="rect">
+            <a:avLst/>
+          </a:prstGeom>
+          <a:noFill/>
+          <a:ln/>
+        </p:spPr>
+        <p:txBody>
+          <a:bodyPr wrap="square" lIns="0" tIns="0" rIns="0" bIns="0" rtlCol="0" anchor="ctr"/>
+          <a:lstStyle/>
+          <a:p>
+            <a:pPr indent="0" marL="0">
+              <a:buNone/>
+            </a:pPr>
+            <a:r>
+              <a:rPr lang="en-US" sz="2500" b="1" dirty="0">
                 <a:solidFill>
                   <a:srgbClr val="1E2761"/>
                 </a:solidFill>
@@ -7973,44 +7973,152 @@
               </a:rPr>
               <a:t>One city workflow, end to end</a:t>
             </a:r>
-            <a:endParaRPr lang="en-US" sz="2300" dirty="0"/>
-          </a:p>
-        </p:txBody>
-      </p:sp>
-      <p:sp>
-        <p:nvSpPr>
-          <p:cNvPr id="7" name="Text 5"/>
-          <p:cNvSpPr txBox="1"/>
-          <p:nvPr/>
-        </p:nvSpPr>
-        <p:spPr>
-          <a:xfrm>
-            <a:off x="1069848" y="2889504"/>
-            <a:ext cx="914400" cy="274320"/>
-          </a:xfrm>
-          <a:prstGeom prst="rect">
-            <a:avLst/>
-          </a:prstGeom>
-          <a:noFill/>
-          <a:ln/>
-        </p:spPr>
-        <p:txBody>
-          <a:bodyPr wrap="square" lIns="0" tIns="0" rIns="0" bIns="0" rtlCol="0" anchor="ctr"/>
-          <a:lstStyle/>
-          <a:p>
-            <a:pPr indent="0" marL="0">
-              <a:buNone/>
-            </a:pPr>
-            <a:r>
-              <a:rPr lang="en-US" sz="1300" b="1" dirty="0">
+            <a:endParaRPr lang="en-US" sz="2500" dirty="0"/>
+          </a:p>
+        </p:txBody>
+      </p:sp>
+      <p:sp>
+        <p:nvSpPr>
+          <p:cNvPr id="7" name="Shape 5"/>
+          <p:cNvSpPr/>
+          <p:nvPr/>
+        </p:nvSpPr>
+        <p:spPr>
+          <a:xfrm>
+            <a:off x="1069848" y="2980944"/>
+            <a:ext cx="384048" cy="384048"/>
+          </a:xfrm>
+          <a:prstGeom prst="roundRect">
+            <a:avLst>
+              <a:gd name="adj" fmla="val 19048"/>
+            </a:avLst>
+          </a:prstGeom>
+          <a:solidFill>
+            <a:srgbClr val="1E2761"/>
+          </a:solidFill>
+          <a:ln w="12700">
+            <a:solidFill>
+              <a:srgbClr val="1E2761"/>
+            </a:solidFill>
+            <a:prstDash val="solid"/>
+          </a:ln>
+        </p:spPr>
+      </p:sp>
+      <p:sp>
+        <p:nvSpPr>
+          <p:cNvPr id="8" name="Text 6"/>
+          <p:cNvSpPr txBox="1"/>
+          <p:nvPr/>
+        </p:nvSpPr>
+        <p:spPr>
+          <a:xfrm>
+            <a:off x="1069848" y="2980944"/>
+            <a:ext cx="384048" cy="384048"/>
+          </a:xfrm>
+          <a:prstGeom prst="rect">
+            <a:avLst/>
+          </a:prstGeom>
+          <a:noFill/>
+          <a:ln/>
+        </p:spPr>
+        <p:txBody>
+          <a:bodyPr wrap="square" lIns="0" tIns="0" rIns="0" bIns="0" rtlCol="0" anchor="ctr"/>
+          <a:lstStyle/>
+          <a:p>
+            <a:pPr algn="ctr" indent="0" marL="0">
+              <a:buNone/>
+            </a:pPr>
+            <a:r>
+              <a:rPr lang="en-US" sz="1100" b="1" dirty="0">
+                <a:solidFill>
+                  <a:srgbClr val="FFFFFF"/>
+                </a:solidFill>
+                <a:latin typeface="Courier New" pitchFamily="34" charset="0"/>
+                <a:ea typeface="Courier New" pitchFamily="34" charset="-122"/>
+                <a:cs typeface="Courier New" pitchFamily="34" charset="-120"/>
+              </a:rPr>
+              <a:t>01</a:t>
+            </a:r>
+            <a:endParaRPr lang="en-US" sz="1100" dirty="0"/>
+          </a:p>
+        </p:txBody>
+      </p:sp>
+      <p:sp>
+        <p:nvSpPr>
+          <p:cNvPr id="9" name="Text 7"/>
+          <p:cNvSpPr txBox="1"/>
+          <p:nvPr/>
+        </p:nvSpPr>
+        <p:spPr>
+          <a:xfrm>
+            <a:off x="1069848" y="3529584"/>
+            <a:ext cx="3044952" cy="329184"/>
+          </a:xfrm>
+          <a:prstGeom prst="rect">
+            <a:avLst/>
+          </a:prstGeom>
+          <a:noFill/>
+          <a:ln/>
+        </p:spPr>
+        <p:txBody>
+          <a:bodyPr wrap="square" lIns="0" tIns="0" rIns="0" bIns="0" rtlCol="0" anchor="ctr"/>
+          <a:lstStyle/>
+          <a:p>
+            <a:pPr indent="0" marL="0">
+              <a:buNone/>
+            </a:pPr>
+            <a:r>
+              <a:rPr lang="en-US" sz="1900" b="1" dirty="0">
                 <a:solidFill>
                   <a:srgbClr val="1E2761"/>
+                </a:solidFill>
+                <a:latin typeface="Cambria" pitchFamily="34" charset="0"/>
+                <a:ea typeface="Cambria" pitchFamily="34" charset="-122"/>
+                <a:cs typeface="Cambria" pitchFamily="34" charset="-120"/>
+              </a:rPr>
+              <a:t>Scope</a:t>
+            </a:r>
+            <a:endParaRPr lang="en-US" sz="1900" dirty="0"/>
+          </a:p>
+        </p:txBody>
+      </p:sp>
+      <p:sp>
+        <p:nvSpPr>
+          <p:cNvPr id="10" name="Text 8"/>
+          <p:cNvSpPr txBox="1"/>
+          <p:nvPr/>
+        </p:nvSpPr>
+        <p:spPr>
+          <a:xfrm>
+            <a:off x="1069848" y="3950208"/>
+            <a:ext cx="3044952" cy="658368"/>
+          </a:xfrm>
+          <a:prstGeom prst="rect">
+            <a:avLst/>
+          </a:prstGeom>
+          <a:noFill/>
+          <a:ln/>
+        </p:spPr>
+        <p:txBody>
+          <a:bodyPr wrap="square" lIns="0" tIns="0" rIns="0" bIns="0" rtlCol="0" anchor="ctr"/>
+          <a:lstStyle/>
+          <a:p>
+            <a:pPr indent="0" marL="0">
+              <a:lnSpc>
+                <a:spcPts val="1900"/>
+              </a:lnSpc>
+              <a:buNone/>
+            </a:pPr>
+            <a:r>
+              <a:rPr lang="en-US" sz="1300" dirty="0">
+                <a:solidFill>
+                  <a:srgbClr val="5B6883"/>
                 </a:solidFill>
                 <a:latin typeface="Calibri" pitchFamily="34" charset="0"/>
                 <a:ea typeface="Calibri" pitchFamily="34" charset="-122"/>
                 <a:cs typeface="Calibri" pitchFamily="34" charset="-120"/>
               </a:rPr>
-              <a:t>Scope</a:t>
+              <a:t>A single agent workflow with a real spending or data boundary.</a:t>
             </a:r>
             <a:endParaRPr lang="en-US" sz="1300" dirty="0"/>
           </a:p>
@@ -8018,14 +8126,119 @@
       </p:sp>
       <p:sp>
         <p:nvSpPr>
-          <p:cNvPr id="8" name="Text 6"/>
-          <p:cNvSpPr txBox="1"/>
-          <p:nvPr/>
-        </p:nvSpPr>
-        <p:spPr>
-          <a:xfrm>
-            <a:off x="2057400" y="2889504"/>
-            <a:ext cx="3840480" cy="512064"/>
+          <p:cNvPr id="11" name="Shape 9"/>
+          <p:cNvSpPr/>
+          <p:nvPr/>
+        </p:nvSpPr>
+        <p:spPr>
+          <a:xfrm>
+            <a:off x="4572000" y="2980944"/>
+            <a:ext cx="384048" cy="384048"/>
+          </a:xfrm>
+          <a:prstGeom prst="roundRect">
+            <a:avLst>
+              <a:gd name="adj" fmla="val 19048"/>
+            </a:avLst>
+          </a:prstGeom>
+          <a:solidFill>
+            <a:srgbClr val="1E2761"/>
+          </a:solidFill>
+          <a:ln w="12700">
+            <a:solidFill>
+              <a:srgbClr val="1E2761"/>
+            </a:solidFill>
+            <a:prstDash val="solid"/>
+          </a:ln>
+        </p:spPr>
+      </p:sp>
+      <p:sp>
+        <p:nvSpPr>
+          <p:cNvPr id="12" name="Text 10"/>
+          <p:cNvSpPr txBox="1"/>
+          <p:nvPr/>
+        </p:nvSpPr>
+        <p:spPr>
+          <a:xfrm>
+            <a:off x="4572000" y="2980944"/>
+            <a:ext cx="384048" cy="384048"/>
+          </a:xfrm>
+          <a:prstGeom prst="rect">
+            <a:avLst/>
+          </a:prstGeom>
+          <a:noFill/>
+          <a:ln/>
+        </p:spPr>
+        <p:txBody>
+          <a:bodyPr wrap="square" lIns="0" tIns="0" rIns="0" bIns="0" rtlCol="0" anchor="ctr"/>
+          <a:lstStyle/>
+          <a:p>
+            <a:pPr algn="ctr" indent="0" marL="0">
+              <a:buNone/>
+            </a:pPr>
+            <a:r>
+              <a:rPr lang="en-US" sz="1100" b="1" dirty="0">
+                <a:solidFill>
+                  <a:srgbClr val="FFFFFF"/>
+                </a:solidFill>
+                <a:latin typeface="Courier New" pitchFamily="34" charset="0"/>
+                <a:ea typeface="Courier New" pitchFamily="34" charset="-122"/>
+                <a:cs typeface="Courier New" pitchFamily="34" charset="-120"/>
+              </a:rPr>
+              <a:t>02</a:t>
+            </a:r>
+            <a:endParaRPr lang="en-US" sz="1100" dirty="0"/>
+          </a:p>
+        </p:txBody>
+      </p:sp>
+      <p:sp>
+        <p:nvSpPr>
+          <p:cNvPr id="13" name="Text 11"/>
+          <p:cNvSpPr txBox="1"/>
+          <p:nvPr/>
+        </p:nvSpPr>
+        <p:spPr>
+          <a:xfrm>
+            <a:off x="4572000" y="3529584"/>
+            <a:ext cx="3044952" cy="329184"/>
+          </a:xfrm>
+          <a:prstGeom prst="rect">
+            <a:avLst/>
+          </a:prstGeom>
+          <a:noFill/>
+          <a:ln/>
+        </p:spPr>
+        <p:txBody>
+          <a:bodyPr wrap="square" lIns="0" tIns="0" rIns="0" bIns="0" rtlCol="0" anchor="ctr"/>
+          <a:lstStyle/>
+          <a:p>
+            <a:pPr indent="0" marL="0">
+              <a:buNone/>
+            </a:pPr>
+            <a:r>
+              <a:rPr lang="en-US" sz="1900" b="1" dirty="0">
+                <a:solidFill>
+                  <a:srgbClr val="1E2761"/>
+                </a:solidFill>
+                <a:latin typeface="Cambria" pitchFamily="34" charset="0"/>
+                <a:ea typeface="Cambria" pitchFamily="34" charset="-122"/>
+                <a:cs typeface="Cambria" pitchFamily="34" charset="-120"/>
+              </a:rPr>
+              <a:t>People</a:t>
+            </a:r>
+            <a:endParaRPr lang="en-US" sz="1900" dirty="0"/>
+          </a:p>
+        </p:txBody>
+      </p:sp>
+      <p:sp>
+        <p:nvSpPr>
+          <p:cNvPr id="14" name="Text 12"/>
+          <p:cNvSpPr txBox="1"/>
+          <p:nvPr/>
+        </p:nvSpPr>
+        <p:spPr>
+          <a:xfrm>
+            <a:off x="4572000" y="3950208"/>
+            <a:ext cx="3044952" cy="658368"/>
           </a:xfrm>
           <a:prstGeom prst="rect">
             <a:avLst/>
@@ -8039,7 +8252,7 @@
           <a:p>
             <a:pPr indent="0" marL="0">
               <a:lnSpc>
-                <a:spcPts val="1800"/>
+                <a:spcPts val="1900"/>
               </a:lnSpc>
               <a:buNone/>
             </a:pPr>
@@ -8052,7 +8265,7 @@
                 <a:ea typeface="Calibri" pitchFamily="34" charset="-122"/>
                 <a:cs typeface="Calibri" pitchFamily="34" charset="-120"/>
               </a:rPr>
-              <a:t>A single agent workflow with a real spending or data boundary.</a:t>
+              <a:t>One technical owner on the city side. No procurement cycle to start.</a:t>
             </a:r>
             <a:endParaRPr lang="en-US" sz="1300" dirty="0"/>
           </a:p>
@@ -8060,38 +8273,146 @@
       </p:sp>
       <p:sp>
         <p:nvSpPr>
-          <p:cNvPr id="9" name="Text 7"/>
-          <p:cNvSpPr txBox="1"/>
-          <p:nvPr/>
-        </p:nvSpPr>
-        <p:spPr>
-          <a:xfrm>
-            <a:off x="1069848" y="3529584"/>
-            <a:ext cx="914400" cy="274320"/>
-          </a:xfrm>
-          <a:prstGeom prst="rect">
-            <a:avLst/>
-          </a:prstGeom>
-          <a:noFill/>
-          <a:ln/>
-        </p:spPr>
-        <p:txBody>
-          <a:bodyPr wrap="square" lIns="0" tIns="0" rIns="0" bIns="0" rtlCol="0" anchor="ctr"/>
-          <a:lstStyle/>
-          <a:p>
-            <a:pPr indent="0" marL="0">
-              <a:buNone/>
-            </a:pPr>
-            <a:r>
-              <a:rPr lang="en-US" sz="1300" b="1" dirty="0">
+          <p:cNvPr id="15" name="Shape 13"/>
+          <p:cNvSpPr/>
+          <p:nvPr/>
+        </p:nvSpPr>
+        <p:spPr>
+          <a:xfrm>
+            <a:off x="8074152" y="2980944"/>
+            <a:ext cx="384048" cy="384048"/>
+          </a:xfrm>
+          <a:prstGeom prst="roundRect">
+            <a:avLst>
+              <a:gd name="adj" fmla="val 19048"/>
+            </a:avLst>
+          </a:prstGeom>
+          <a:solidFill>
+            <a:srgbClr val="1E2761"/>
+          </a:solidFill>
+          <a:ln w="12700">
+            <a:solidFill>
+              <a:srgbClr val="1E2761"/>
+            </a:solidFill>
+            <a:prstDash val="solid"/>
+          </a:ln>
+        </p:spPr>
+      </p:sp>
+      <p:sp>
+        <p:nvSpPr>
+          <p:cNvPr id="16" name="Text 14"/>
+          <p:cNvSpPr txBox="1"/>
+          <p:nvPr/>
+        </p:nvSpPr>
+        <p:spPr>
+          <a:xfrm>
+            <a:off x="8074152" y="2980944"/>
+            <a:ext cx="384048" cy="384048"/>
+          </a:xfrm>
+          <a:prstGeom prst="rect">
+            <a:avLst/>
+          </a:prstGeom>
+          <a:noFill/>
+          <a:ln/>
+        </p:spPr>
+        <p:txBody>
+          <a:bodyPr wrap="square" lIns="0" tIns="0" rIns="0" bIns="0" rtlCol="0" anchor="ctr"/>
+          <a:lstStyle/>
+          <a:p>
+            <a:pPr algn="ctr" indent="0" marL="0">
+              <a:buNone/>
+            </a:pPr>
+            <a:r>
+              <a:rPr lang="en-US" sz="1100" b="1" dirty="0">
+                <a:solidFill>
+                  <a:srgbClr val="FFFFFF"/>
+                </a:solidFill>
+                <a:latin typeface="Courier New" pitchFamily="34" charset="0"/>
+                <a:ea typeface="Courier New" pitchFamily="34" charset="-122"/>
+                <a:cs typeface="Courier New" pitchFamily="34" charset="-120"/>
+              </a:rPr>
+              <a:t>03</a:t>
+            </a:r>
+            <a:endParaRPr lang="en-US" sz="1100" dirty="0"/>
+          </a:p>
+        </p:txBody>
+      </p:sp>
+      <p:sp>
+        <p:nvSpPr>
+          <p:cNvPr id="17" name="Text 15"/>
+          <p:cNvSpPr txBox="1"/>
+          <p:nvPr/>
+        </p:nvSpPr>
+        <p:spPr>
+          <a:xfrm>
+            <a:off x="8074152" y="3529584"/>
+            <a:ext cx="3044952" cy="329184"/>
+          </a:xfrm>
+          <a:prstGeom prst="rect">
+            <a:avLst/>
+          </a:prstGeom>
+          <a:noFill/>
+          <a:ln/>
+        </p:spPr>
+        <p:txBody>
+          <a:bodyPr wrap="square" lIns="0" tIns="0" rIns="0" bIns="0" rtlCol="0" anchor="ctr"/>
+          <a:lstStyle/>
+          <a:p>
+            <a:pPr indent="0" marL="0">
+              <a:buNone/>
+            </a:pPr>
+            <a:r>
+              <a:rPr lang="en-US" sz="1900" b="1" dirty="0">
                 <a:solidFill>
                   <a:srgbClr val="1E2761"/>
+                </a:solidFill>
+                <a:latin typeface="Cambria" pitchFamily="34" charset="0"/>
+                <a:ea typeface="Cambria" pitchFamily="34" charset="-122"/>
+                <a:cs typeface="Cambria" pitchFamily="34" charset="-120"/>
+              </a:rPr>
+              <a:t>Result</a:t>
+            </a:r>
+            <a:endParaRPr lang="en-US" sz="1900" dirty="0"/>
+          </a:p>
+        </p:txBody>
+      </p:sp>
+      <p:sp>
+        <p:nvSpPr>
+          <p:cNvPr id="18" name="Text 16"/>
+          <p:cNvSpPr txBox="1"/>
+          <p:nvPr/>
+        </p:nvSpPr>
+        <p:spPr>
+          <a:xfrm>
+            <a:off x="8074152" y="3950208"/>
+            <a:ext cx="3044952" cy="658368"/>
+          </a:xfrm>
+          <a:prstGeom prst="rect">
+            <a:avLst/>
+          </a:prstGeom>
+          <a:noFill/>
+          <a:ln/>
+        </p:spPr>
+        <p:txBody>
+          <a:bodyPr wrap="square" lIns="0" tIns="0" rIns="0" bIns="0" rtlCol="0" anchor="ctr"/>
+          <a:lstStyle/>
+          <a:p>
+            <a:pPr indent="0" marL="0">
+              <a:lnSpc>
+                <a:spcPts val="1900"/>
+              </a:lnSpc>
+              <a:buNone/>
+            </a:pPr>
+            <a:r>
+              <a:rPr lang="en-US" sz="1300" dirty="0">
+                <a:solidFill>
+                  <a:srgbClr val="5B6883"/>
                 </a:solidFill>
                 <a:latin typeface="Calibri" pitchFamily="34" charset="0"/>
                 <a:ea typeface="Calibri" pitchFamily="34" charset="-122"/>
                 <a:cs typeface="Calibri" pitchFamily="34" charset="-120"/>
               </a:rPr>
-              <a:t>People</a:t>
+              <a:t>Agent identity, enforced policy, and evidence a third party can verify.</a:t>
             </a:r>
             <a:endParaRPr lang="en-US" sz="1300" dirty="0"/>
           </a:p>
@@ -8099,33 +8420,69 @@
       </p:sp>
       <p:sp>
         <p:nvSpPr>
-          <p:cNvPr id="10" name="Text 8"/>
-          <p:cNvSpPr txBox="1"/>
-          <p:nvPr/>
-        </p:nvSpPr>
-        <p:spPr>
-          <a:xfrm>
-            <a:off x="2057400" y="3529584"/>
-            <a:ext cx="3840480" cy="512064"/>
-          </a:xfrm>
-          <a:prstGeom prst="rect">
-            <a:avLst/>
-          </a:prstGeom>
-          <a:noFill/>
-          <a:ln/>
-        </p:spPr>
-        <p:txBody>
-          <a:bodyPr wrap="square" lIns="0" tIns="0" rIns="0" bIns="0" rtlCol="0" anchor="ctr"/>
-          <a:lstStyle/>
-          <a:p>
-            <a:pPr indent="0" marL="0">
-              <a:lnSpc>
-                <a:spcPts val="1800"/>
-              </a:lnSpc>
-              <a:buNone/>
-            </a:pPr>
-            <a:r>
-              <a:rPr lang="en-US" sz="1300" dirty="0">
+          <p:cNvPr id="19" name="Text 17"/>
+          <p:cNvSpPr txBox="1"/>
+          <p:nvPr/>
+        </p:nvSpPr>
+        <p:spPr>
+          <a:xfrm>
+            <a:off x="685800" y="5084064"/>
+            <a:ext cx="3566160" cy="274320"/>
+          </a:xfrm>
+          <a:prstGeom prst="rect">
+            <a:avLst/>
+          </a:prstGeom>
+          <a:noFill/>
+          <a:ln/>
+        </p:spPr>
+        <p:txBody>
+          <a:bodyPr wrap="square" lIns="0" tIns="0" rIns="0" bIns="0" rtlCol="0" anchor="ctr"/>
+          <a:lstStyle/>
+          <a:p>
+            <a:pPr indent="0" marL="0">
+              <a:buNone/>
+            </a:pPr>
+            <a:r>
+              <a:rPr lang="en-US" sz="1600" b="1" dirty="0">
+                <a:solidFill>
+                  <a:srgbClr val="1E2761"/>
+                </a:solidFill>
+                <a:latin typeface="Cambria" pitchFamily="34" charset="0"/>
+                <a:ea typeface="Cambria" pitchFamily="34" charset="-122"/>
+                <a:cs typeface="Cambria" pitchFamily="34" charset="-120"/>
+              </a:rPr>
+              <a:t>Boulder, Colorado</a:t>
+            </a:r>
+            <a:endParaRPr lang="en-US" sz="1600" dirty="0"/>
+          </a:p>
+        </p:txBody>
+      </p:sp>
+      <p:sp>
+        <p:nvSpPr>
+          <p:cNvPr id="20" name="Text 18"/>
+          <p:cNvSpPr txBox="1"/>
+          <p:nvPr/>
+        </p:nvSpPr>
+        <p:spPr>
+          <a:xfrm>
+            <a:off x="685800" y="5394960"/>
+            <a:ext cx="3566160" cy="274320"/>
+          </a:xfrm>
+          <a:prstGeom prst="rect">
+            <a:avLst/>
+          </a:prstGeom>
+          <a:noFill/>
+          <a:ln/>
+        </p:spPr>
+        <p:txBody>
+          <a:bodyPr wrap="square" lIns="0" tIns="0" rIns="0" bIns="0" rtlCol="0" anchor="ctr"/>
+          <a:lstStyle/>
+          <a:p>
+            <a:pPr indent="0" marL="0">
+              <a:buNone/>
+            </a:pPr>
+            <a:r>
+              <a:rPr lang="en-US" sz="1250" dirty="0">
                 <a:solidFill>
                   <a:srgbClr val="5B6883"/>
                 </a:solidFill>
@@ -8133,80 +8490,155 @@
                 <a:ea typeface="Calibri" pitchFamily="34" charset="-122"/>
                 <a:cs typeface="Calibri" pitchFamily="34" charset="-120"/>
               </a:rPr>
-              <a:t>One technical owner on the city side. No procurement cycle to start.</a:t>
-            </a:r>
-            <a:endParaRPr lang="en-US" sz="1300" dirty="0"/>
-          </a:p>
-        </p:txBody>
-      </p:sp>
-      <p:sp>
-        <p:nvSpPr>
-          <p:cNvPr id="11" name="Text 9"/>
-          <p:cNvSpPr txBox="1"/>
-          <p:nvPr/>
-        </p:nvSpPr>
-        <p:spPr>
-          <a:xfrm>
-            <a:off x="1069848" y="4169664"/>
-            <a:ext cx="914400" cy="274320"/>
-          </a:xfrm>
-          <a:prstGeom prst="rect">
-            <a:avLst/>
-          </a:prstGeom>
-          <a:noFill/>
-          <a:ln/>
-        </p:spPr>
-        <p:txBody>
-          <a:bodyPr wrap="square" lIns="0" tIns="0" rIns="0" bIns="0" rtlCol="0" anchor="ctr"/>
-          <a:lstStyle/>
-          <a:p>
-            <a:pPr indent="0" marL="0">
-              <a:buNone/>
-            </a:pPr>
-            <a:r>
-              <a:rPr lang="en-US" sz="1300" b="1" dirty="0">
+              <a:t>Built here</a:t>
+            </a:r>
+            <a:endParaRPr lang="en-US" sz="1250" dirty="0"/>
+          </a:p>
+        </p:txBody>
+      </p:sp>
+      <p:sp>
+        <p:nvSpPr>
+          <p:cNvPr id="21" name="Text 19"/>
+          <p:cNvSpPr txBox="1"/>
+          <p:nvPr/>
+        </p:nvSpPr>
+        <p:spPr>
+          <a:xfrm>
+            <a:off x="4526280" y="5084064"/>
+            <a:ext cx="3566160" cy="274320"/>
+          </a:xfrm>
+          <a:prstGeom prst="rect">
+            <a:avLst/>
+          </a:prstGeom>
+          <a:noFill/>
+          <a:ln/>
+        </p:spPr>
+        <p:txBody>
+          <a:bodyPr wrap="square" lIns="0" tIns="0" rIns="0" bIns="0" rtlCol="0" anchor="ctr"/>
+          <a:lstStyle/>
+          <a:p>
+            <a:pPr indent="0" marL="0">
+              <a:buNone/>
+            </a:pPr>
+            <a:r>
+              <a:rPr lang="en-US" sz="1600" b="1" dirty="0">
                 <a:solidFill>
                   <a:srgbClr val="1E2761"/>
+                </a:solidFill>
+                <a:latin typeface="Cambria" pitchFamily="34" charset="0"/>
+                <a:ea typeface="Cambria" pitchFamily="34" charset="-122"/>
+                <a:cs typeface="Cambria" pitchFamily="34" charset="-120"/>
+              </a:rPr>
+              <a:t>Bootstrapped pre-seed</a:t>
+            </a:r>
+            <a:endParaRPr lang="en-US" sz="1600" dirty="0"/>
+          </a:p>
+        </p:txBody>
+      </p:sp>
+      <p:sp>
+        <p:nvSpPr>
+          <p:cNvPr id="22" name="Text 20"/>
+          <p:cNvSpPr txBox="1"/>
+          <p:nvPr/>
+        </p:nvSpPr>
+        <p:spPr>
+          <a:xfrm>
+            <a:off x="4526280" y="5394960"/>
+            <a:ext cx="3566160" cy="274320"/>
+          </a:xfrm>
+          <a:prstGeom prst="rect">
+            <a:avLst/>
+          </a:prstGeom>
+          <a:noFill/>
+          <a:ln/>
+        </p:spPr>
+        <p:txBody>
+          <a:bodyPr wrap="square" lIns="0" tIns="0" rIns="0" bIns="0" rtlCol="0" anchor="ctr"/>
+          <a:lstStyle/>
+          <a:p>
+            <a:pPr indent="0" marL="0">
+              <a:buNone/>
+            </a:pPr>
+            <a:r>
+              <a:rPr lang="en-US" sz="1250" dirty="0">
+                <a:solidFill>
+                  <a:srgbClr val="5B6883"/>
                 </a:solidFill>
                 <a:latin typeface="Calibri" pitchFamily="34" charset="0"/>
                 <a:ea typeface="Calibri" pitchFamily="34" charset="-122"/>
                 <a:cs typeface="Calibri" pitchFamily="34" charset="-120"/>
               </a:rPr>
-              <a:t>Result</a:t>
-            </a:r>
-            <a:endParaRPr lang="en-US" sz="1300" dirty="0"/>
-          </a:p>
-        </p:txBody>
-      </p:sp>
-      <p:sp>
-        <p:nvSpPr>
-          <p:cNvPr id="12" name="Text 10"/>
-          <p:cNvSpPr txBox="1"/>
-          <p:nvPr/>
-        </p:nvSpPr>
-        <p:spPr>
-          <a:xfrm>
-            <a:off x="2057400" y="4169664"/>
-            <a:ext cx="3840480" cy="512064"/>
-          </a:xfrm>
-          <a:prstGeom prst="rect">
-            <a:avLst/>
-          </a:prstGeom>
-          <a:noFill/>
-          <a:ln/>
-        </p:spPr>
-        <p:txBody>
-          <a:bodyPr wrap="square" lIns="0" tIns="0" rIns="0" bIns="0" rtlCol="0" anchor="ctr"/>
-          <a:lstStyle/>
-          <a:p>
-            <a:pPr indent="0" marL="0">
-              <a:lnSpc>
-                <a:spcPts val="1800"/>
-              </a:lnSpc>
-              <a:buNone/>
-            </a:pPr>
-            <a:r>
-              <a:rPr lang="en-US" sz="1300" dirty="0">
+              <a:t>No outside capital</a:t>
+            </a:r>
+            <a:endParaRPr lang="en-US" sz="1250" dirty="0"/>
+          </a:p>
+        </p:txBody>
+      </p:sp>
+      <p:sp>
+        <p:nvSpPr>
+          <p:cNvPr id="23" name="Text 21"/>
+          <p:cNvSpPr txBox="1"/>
+          <p:nvPr/>
+        </p:nvSpPr>
+        <p:spPr>
+          <a:xfrm>
+            <a:off x="8366760" y="5084064"/>
+            <a:ext cx="3566160" cy="274320"/>
+          </a:xfrm>
+          <a:prstGeom prst="rect">
+            <a:avLst/>
+          </a:prstGeom>
+          <a:noFill/>
+          <a:ln/>
+        </p:spPr>
+        <p:txBody>
+          <a:bodyPr wrap="square" lIns="0" tIns="0" rIns="0" bIns="0" rtlCol="0" anchor="ctr"/>
+          <a:lstStyle/>
+          <a:p>
+            <a:pPr indent="0" marL="0">
+              <a:buNone/>
+            </a:pPr>
+            <a:r>
+              <a:rPr lang="en-US" sz="1600" b="1" dirty="0">
+                <a:solidFill>
+                  <a:srgbClr val="1E2761"/>
+                </a:solidFill>
+                <a:latin typeface="Cambria" pitchFamily="34" charset="0"/>
+                <a:ea typeface="Cambria" pitchFamily="34" charset="-122"/>
+                <a:cs typeface="Cambria" pitchFamily="34" charset="-120"/>
+              </a:rPr>
+              <a:t>Working software</a:t>
+            </a:r>
+            <a:endParaRPr lang="en-US" sz="1600" dirty="0"/>
+          </a:p>
+        </p:txBody>
+      </p:sp>
+      <p:sp>
+        <p:nvSpPr>
+          <p:cNvPr id="24" name="Text 22"/>
+          <p:cNvSpPr txBox="1"/>
+          <p:nvPr/>
+        </p:nvSpPr>
+        <p:spPr>
+          <a:xfrm>
+            <a:off x="8366760" y="5394960"/>
+            <a:ext cx="3566160" cy="274320"/>
+          </a:xfrm>
+          <a:prstGeom prst="rect">
+            <a:avLst/>
+          </a:prstGeom>
+          <a:noFill/>
+          <a:ln/>
+        </p:spPr>
+        <p:txBody>
+          <a:bodyPr wrap="square" lIns="0" tIns="0" rIns="0" bIns="0" rtlCol="0" anchor="ctr"/>
+          <a:lstStyle/>
+          <a:p>
+            <a:pPr indent="0" marL="0">
+              <a:buNone/>
+            </a:pPr>
+            <a:r>
+              <a:rPr lang="en-US" sz="1250" dirty="0">
                 <a:solidFill>
                   <a:srgbClr val="5B6883"/>
                 </a:solidFill>
@@ -8214,455 +8646,45 @@
                 <a:ea typeface="Calibri" pitchFamily="34" charset="-122"/>
                 <a:cs typeface="Calibri" pitchFamily="34" charset="-120"/>
               </a:rPr>
-              <a:t>Agent identity, enforced policy, and evidence a third party can verify.</a:t>
-            </a:r>
-            <a:endParaRPr lang="en-US" sz="1300" dirty="0"/>
-          </a:p>
-        </p:txBody>
-      </p:sp>
-      <p:sp>
-        <p:nvSpPr>
-          <p:cNvPr id="13" name="Shape 11"/>
-          <p:cNvSpPr/>
-          <p:nvPr/>
-        </p:nvSpPr>
-        <p:spPr>
-          <a:xfrm>
-            <a:off x="6647688" y="1700784"/>
-            <a:ext cx="4855464" cy="3127248"/>
-          </a:xfrm>
-          <a:prstGeom prst="roundRect">
-            <a:avLst>
-              <a:gd name="adj" fmla="val 1462"/>
-            </a:avLst>
-          </a:prstGeom>
-          <a:solidFill>
-            <a:srgbClr val="FFF4E0"/>
-          </a:solidFill>
-          <a:ln w="19050">
-            <a:solidFill>
-              <a:srgbClr val="E3B45E"/>
-            </a:solidFill>
-            <a:prstDash val="solid"/>
-          </a:ln>
-        </p:spPr>
-      </p:sp>
-      <p:sp>
-        <p:nvSpPr>
-          <p:cNvPr id="14" name="Text 12"/>
-          <p:cNvSpPr txBox="1"/>
-          <p:nvPr/>
-        </p:nvSpPr>
-        <p:spPr>
-          <a:xfrm>
-            <a:off x="7031736" y="1975104"/>
-            <a:ext cx="4114800" cy="256032"/>
-          </a:xfrm>
-          <a:prstGeom prst="rect">
-            <a:avLst/>
-          </a:prstGeom>
-          <a:noFill/>
-          <a:ln/>
-        </p:spPr>
-        <p:txBody>
-          <a:bodyPr wrap="square" lIns="0" tIns="0" rIns="0" bIns="0" rtlCol="0" anchor="ctr"/>
-          <a:lstStyle/>
-          <a:p>
-            <a:pPr indent="0" marL="0">
-              <a:buNone/>
-            </a:pPr>
-            <a:r>
-              <a:rPr lang="en-US" sz="1000" b="1" spc="120" kern="0" dirty="0">
-                <a:solidFill>
-                  <a:srgbClr val="8A5A12"/>
-                </a:solidFill>
-                <a:latin typeface="Courier New" pitchFamily="34" charset="0"/>
-                <a:ea typeface="Courier New" pitchFamily="34" charset="-122"/>
-                <a:cs typeface="Courier New" pitchFamily="34" charset="-120"/>
-              </a:rPr>
-              <a:t>COLORADO ANCHOR</a:t>
-            </a:r>
-            <a:endParaRPr lang="en-US" sz="1000" dirty="0"/>
-          </a:p>
-        </p:txBody>
-      </p:sp>
-      <p:sp>
-        <p:nvSpPr>
-          <p:cNvPr id="15" name="Text 13"/>
-          <p:cNvSpPr txBox="1"/>
-          <p:nvPr/>
-        </p:nvSpPr>
-        <p:spPr>
-          <a:xfrm>
-            <a:off x="7031736" y="2304288"/>
-            <a:ext cx="4114800" cy="365760"/>
-          </a:xfrm>
-          <a:prstGeom prst="rect">
-            <a:avLst/>
-          </a:prstGeom>
-          <a:noFill/>
-          <a:ln/>
-        </p:spPr>
-        <p:txBody>
-          <a:bodyPr wrap="square" lIns="0" tIns="0" rIns="0" bIns="0" rtlCol="0" anchor="ctr"/>
-          <a:lstStyle/>
-          <a:p>
-            <a:pPr indent="0" marL="0">
-              <a:buNone/>
-            </a:pPr>
-            <a:r>
-              <a:rPr lang="en-US" sz="1700" b="1" dirty="0">
-                <a:solidFill>
-                  <a:srgbClr val="8A5A12"/>
-                </a:solidFill>
-                <a:latin typeface="Cambria" pitchFamily="34" charset="0"/>
-                <a:ea typeface="Cambria" pitchFamily="34" charset="-122"/>
-                <a:cs typeface="Cambria" pitchFamily="34" charset="-120"/>
-              </a:rPr>
-              <a:t>[ REPLACE THIS CARD ]</a:t>
-            </a:r>
-            <a:endParaRPr lang="en-US" sz="1700" dirty="0"/>
-          </a:p>
-        </p:txBody>
-      </p:sp>
-      <p:sp>
-        <p:nvSpPr>
-          <p:cNvPr id="16" name="Text 14"/>
-          <p:cNvSpPr txBox="1"/>
-          <p:nvPr/>
-        </p:nvSpPr>
-        <p:spPr>
-          <a:xfrm>
-            <a:off x="7031736" y="2779776"/>
-            <a:ext cx="4114800" cy="1828800"/>
-          </a:xfrm>
-          <a:prstGeom prst="rect">
-            <a:avLst/>
-          </a:prstGeom>
-          <a:noFill/>
-          <a:ln/>
-        </p:spPr>
-        <p:txBody>
-          <a:bodyPr wrap="square" lIns="0" tIns="0" rIns="0" bIns="0" rtlCol="0" anchor="ctr"/>
-          <a:lstStyle/>
-          <a:p>
-            <a:pPr indent="0" marL="0">
-              <a:lnSpc>
-                <a:spcPts val="1800"/>
-              </a:lnSpc>
-              <a:buNone/>
-            </a:pPr>
-            <a:r>
-              <a:rPr lang="en-US" sz="1250" dirty="0">
-                <a:solidFill>
-                  <a:srgbClr val="8A5A12"/>
+              <a:t>Not a prototype</a:t>
+            </a:r>
+            <a:endParaRPr lang="en-US" sz="1250" dirty="0"/>
+          </a:p>
+        </p:txBody>
+      </p:sp>
+      <p:sp>
+        <p:nvSpPr>
+          <p:cNvPr id="25" name="Text 23"/>
+          <p:cNvSpPr txBox="1"/>
+          <p:nvPr/>
+        </p:nvSpPr>
+        <p:spPr>
+          <a:xfrm>
+            <a:off x="685800" y="6327648"/>
+            <a:ext cx="2743200" cy="237744"/>
+          </a:xfrm>
+          <a:prstGeom prst="rect">
+            <a:avLst/>
+          </a:prstGeom>
+          <a:noFill/>
+          <a:ln/>
+        </p:spPr>
+        <p:txBody>
+          <a:bodyPr wrap="square" lIns="0" tIns="0" rIns="0" bIns="0" rtlCol="0" anchor="ctr"/>
+          <a:lstStyle/>
+          <a:p>
+            <a:pPr indent="0" marL="0">
+              <a:buNone/>
+            </a:pPr>
+            <a:r>
+              <a:rPr lang="en-US" sz="950" dirty="0">
+                <a:solidFill>
+                  <a:srgbClr val="5B6883"/>
                 </a:solidFill>
                 <a:latin typeface="Calibri" pitchFamily="34" charset="0"/>
                 <a:ea typeface="Calibri" pitchFamily="34" charset="-122"/>
                 <a:cs typeface="Calibri" pitchFamily="34" charset="-120"/>
               </a:rPr>
-              <a:t>Name the Colorado agency, department, or district you have already spoken with, the person who owns the workflow, and the workflow itself.</a:t>
-            </a:r>
-            <a:endParaRPr lang="en-US" sz="1250" dirty="0"/>
-          </a:p>
-          <a:p>
-            <a:pPr indent="0" marL="0">
-              <a:lnSpc>
-                <a:spcPts val="1800"/>
-              </a:lnSpc>
-              <a:buNone/>
-            </a:pPr>
-            <a:endParaRPr lang="en-US" sz="1250" dirty="0"/>
-          </a:p>
-          <a:p>
-            <a:pPr indent="0" marL="0">
-              <a:lnSpc>
-                <a:spcPts val="1800"/>
-              </a:lnSpc>
-              <a:buNone/>
-            </a:pPr>
-            <a:r>
-              <a:rPr lang="en-US" sz="1250" dirty="0">
-                <a:solidFill>
-                  <a:srgbClr val="8A5A12"/>
-                </a:solidFill>
-                <a:latin typeface="Calibri" pitchFamily="34" charset="0"/>
-                <a:ea typeface="Calibri" pitchFamily="34" charset="-122"/>
-                <a:cs typeface="Calibri" pitchFamily="34" charset="-120"/>
-              </a:rPr>
-              <a:t>If no conversation exists yet, name the specific Denver workflow you have scoped and say what you need to start it. Judges select for local traction — a named workflow beats a generic one.</a:t>
-            </a:r>
-            <a:endParaRPr lang="en-US" sz="1250" dirty="0"/>
-          </a:p>
-        </p:txBody>
-      </p:sp>
-      <p:sp>
-        <p:nvSpPr>
-          <p:cNvPr id="17" name="Text 15"/>
-          <p:cNvSpPr txBox="1"/>
-          <p:nvPr/>
-        </p:nvSpPr>
-        <p:spPr>
-          <a:xfrm>
-            <a:off x="685800" y="5084064"/>
-            <a:ext cx="3566160" cy="274320"/>
-          </a:xfrm>
-          <a:prstGeom prst="rect">
-            <a:avLst/>
-          </a:prstGeom>
-          <a:noFill/>
-          <a:ln/>
-        </p:spPr>
-        <p:txBody>
-          <a:bodyPr wrap="square" lIns="0" tIns="0" rIns="0" bIns="0" rtlCol="0" anchor="ctr"/>
-          <a:lstStyle/>
-          <a:p>
-            <a:pPr indent="0" marL="0">
-              <a:buNone/>
-            </a:pPr>
-            <a:r>
-              <a:rPr lang="en-US" sz="1600" b="1" dirty="0">
-                <a:solidFill>
-                  <a:srgbClr val="1E2761"/>
-                </a:solidFill>
-                <a:latin typeface="Cambria" pitchFamily="34" charset="0"/>
-                <a:ea typeface="Cambria" pitchFamily="34" charset="-122"/>
-                <a:cs typeface="Cambria" pitchFamily="34" charset="-120"/>
-              </a:rPr>
-              <a:t>Boulder, Colorado</a:t>
-            </a:r>
-            <a:endParaRPr lang="en-US" sz="1600" dirty="0"/>
-          </a:p>
-        </p:txBody>
-      </p:sp>
-      <p:sp>
-        <p:nvSpPr>
-          <p:cNvPr id="18" name="Text 16"/>
-          <p:cNvSpPr txBox="1"/>
-          <p:nvPr/>
-        </p:nvSpPr>
-        <p:spPr>
-          <a:xfrm>
-            <a:off x="685800" y="5394960"/>
-            <a:ext cx="3566160" cy="274320"/>
-          </a:xfrm>
-          <a:prstGeom prst="rect">
-            <a:avLst/>
-          </a:prstGeom>
-          <a:noFill/>
-          <a:ln/>
-        </p:spPr>
-        <p:txBody>
-          <a:bodyPr wrap="square" lIns="0" tIns="0" rIns="0" bIns="0" rtlCol="0" anchor="ctr"/>
-          <a:lstStyle/>
-          <a:p>
-            <a:pPr indent="0" marL="0">
-              <a:buNone/>
-            </a:pPr>
-            <a:r>
-              <a:rPr lang="en-US" sz="1250" dirty="0">
-                <a:solidFill>
-                  <a:srgbClr val="5B6883"/>
-                </a:solidFill>
-                <a:latin typeface="Calibri" pitchFamily="34" charset="0"/>
-                <a:ea typeface="Calibri" pitchFamily="34" charset="-122"/>
-                <a:cs typeface="Calibri" pitchFamily="34" charset="-120"/>
-              </a:rPr>
-              <a:t>Built here</a:t>
-            </a:r>
-            <a:endParaRPr lang="en-US" sz="1250" dirty="0"/>
-          </a:p>
-        </p:txBody>
-      </p:sp>
-      <p:sp>
-        <p:nvSpPr>
-          <p:cNvPr id="19" name="Text 17"/>
-          <p:cNvSpPr txBox="1"/>
-          <p:nvPr/>
-        </p:nvSpPr>
-        <p:spPr>
-          <a:xfrm>
-            <a:off x="4526280" y="5084064"/>
-            <a:ext cx="3566160" cy="274320"/>
-          </a:xfrm>
-          <a:prstGeom prst="rect">
-            <a:avLst/>
-          </a:prstGeom>
-          <a:noFill/>
-          <a:ln/>
-        </p:spPr>
-        <p:txBody>
-          <a:bodyPr wrap="square" lIns="0" tIns="0" rIns="0" bIns="0" rtlCol="0" anchor="ctr"/>
-          <a:lstStyle/>
-          <a:p>
-            <a:pPr indent="0" marL="0">
-              <a:buNone/>
-            </a:pPr>
-            <a:r>
-              <a:rPr lang="en-US" sz="1600" b="1" dirty="0">
-                <a:solidFill>
-                  <a:srgbClr val="1E2761"/>
-                </a:solidFill>
-                <a:latin typeface="Cambria" pitchFamily="34" charset="0"/>
-                <a:ea typeface="Cambria" pitchFamily="34" charset="-122"/>
-                <a:cs typeface="Cambria" pitchFamily="34" charset="-120"/>
-              </a:rPr>
-              <a:t>Bootstrapped pre-seed</a:t>
-            </a:r>
-            <a:endParaRPr lang="en-US" sz="1600" dirty="0"/>
-          </a:p>
-        </p:txBody>
-      </p:sp>
-      <p:sp>
-        <p:nvSpPr>
-          <p:cNvPr id="20" name="Text 18"/>
-          <p:cNvSpPr txBox="1"/>
-          <p:nvPr/>
-        </p:nvSpPr>
-        <p:spPr>
-          <a:xfrm>
-            <a:off x="4526280" y="5394960"/>
-            <a:ext cx="3566160" cy="274320"/>
-          </a:xfrm>
-          <a:prstGeom prst="rect">
-            <a:avLst/>
-          </a:prstGeom>
-          <a:noFill/>
-          <a:ln/>
-        </p:spPr>
-        <p:txBody>
-          <a:bodyPr wrap="square" lIns="0" tIns="0" rIns="0" bIns="0" rtlCol="0" anchor="ctr"/>
-          <a:lstStyle/>
-          <a:p>
-            <a:pPr indent="0" marL="0">
-              <a:buNone/>
-            </a:pPr>
-            <a:r>
-              <a:rPr lang="en-US" sz="1250" dirty="0">
-                <a:solidFill>
-                  <a:srgbClr val="5B6883"/>
-                </a:solidFill>
-                <a:latin typeface="Calibri" pitchFamily="34" charset="0"/>
-                <a:ea typeface="Calibri" pitchFamily="34" charset="-122"/>
-                <a:cs typeface="Calibri" pitchFamily="34" charset="-120"/>
-              </a:rPr>
-              <a:t>No outside capital</a:t>
-            </a:r>
-            <a:endParaRPr lang="en-US" sz="1250" dirty="0"/>
-          </a:p>
-        </p:txBody>
-      </p:sp>
-      <p:sp>
-        <p:nvSpPr>
-          <p:cNvPr id="21" name="Text 19"/>
-          <p:cNvSpPr txBox="1"/>
-          <p:nvPr/>
-        </p:nvSpPr>
-        <p:spPr>
-          <a:xfrm>
-            <a:off x="8366760" y="5084064"/>
-            <a:ext cx="3566160" cy="274320"/>
-          </a:xfrm>
-          <a:prstGeom prst="rect">
-            <a:avLst/>
-          </a:prstGeom>
-          <a:noFill/>
-          <a:ln/>
-        </p:spPr>
-        <p:txBody>
-          <a:bodyPr wrap="square" lIns="0" tIns="0" rIns="0" bIns="0" rtlCol="0" anchor="ctr"/>
-          <a:lstStyle/>
-          <a:p>
-            <a:pPr indent="0" marL="0">
-              <a:buNone/>
-            </a:pPr>
-            <a:r>
-              <a:rPr lang="en-US" sz="1600" b="1" dirty="0">
-                <a:solidFill>
-                  <a:srgbClr val="1E2761"/>
-                </a:solidFill>
-                <a:latin typeface="Cambria" pitchFamily="34" charset="0"/>
-                <a:ea typeface="Cambria" pitchFamily="34" charset="-122"/>
-                <a:cs typeface="Cambria" pitchFamily="34" charset="-120"/>
-              </a:rPr>
-              <a:t>Working software</a:t>
-            </a:r>
-            <a:endParaRPr lang="en-US" sz="1600" dirty="0"/>
-          </a:p>
-        </p:txBody>
-      </p:sp>
-      <p:sp>
-        <p:nvSpPr>
-          <p:cNvPr id="22" name="Text 20"/>
-          <p:cNvSpPr txBox="1"/>
-          <p:nvPr/>
-        </p:nvSpPr>
-        <p:spPr>
-          <a:xfrm>
-            <a:off x="8366760" y="5394960"/>
-            <a:ext cx="3566160" cy="274320"/>
-          </a:xfrm>
-          <a:prstGeom prst="rect">
-            <a:avLst/>
-          </a:prstGeom>
-          <a:noFill/>
-          <a:ln/>
-        </p:spPr>
-        <p:txBody>
-          <a:bodyPr wrap="square" lIns="0" tIns="0" rIns="0" bIns="0" rtlCol="0" anchor="ctr"/>
-          <a:lstStyle/>
-          <a:p>
-            <a:pPr indent="0" marL="0">
-              <a:buNone/>
-            </a:pPr>
-            <a:r>
-              <a:rPr lang="en-US" sz="1250" dirty="0">
-                <a:solidFill>
-                  <a:srgbClr val="5B6883"/>
-                </a:solidFill>
-                <a:latin typeface="Calibri" pitchFamily="34" charset="0"/>
-                <a:ea typeface="Calibri" pitchFamily="34" charset="-122"/>
-                <a:cs typeface="Calibri" pitchFamily="34" charset="-120"/>
-              </a:rPr>
-              <a:t>Not a prototype</a:t>
-            </a:r>
-            <a:endParaRPr lang="en-US" sz="1250" dirty="0"/>
-          </a:p>
-        </p:txBody>
-      </p:sp>
-      <p:sp>
-        <p:nvSpPr>
-          <p:cNvPr id="23" name="Text 21"/>
-          <p:cNvSpPr txBox="1"/>
-          <p:nvPr/>
-        </p:nvSpPr>
-        <p:spPr>
-          <a:xfrm>
-            <a:off x="685800" y="6327648"/>
-            <a:ext cx="2743200" cy="237744"/>
-          </a:xfrm>
-          <a:prstGeom prst="rect">
-            <a:avLst/>
-          </a:prstGeom>
-          <a:noFill/>
-          <a:ln/>
-        </p:spPr>
-        <p:txBody>
-          <a:bodyPr wrap="square" lIns="0" tIns="0" rIns="0" bIns="0" rtlCol="0" anchor="ctr"/>
-          <a:lstStyle/>
-          <a:p>
-            <a:pPr indent="0" marL="0">
-              <a:buNone/>
-            </a:pPr>
-            <a:r>
-              <a:rPr lang="en-US" sz="950" dirty="0">
-                <a:solidFill>
-                  <a:srgbClr val="5B6883"/>
-                </a:solidFill>
-                <a:latin typeface="Calibri" pitchFamily="34" charset="0"/>
-                <a:ea typeface="Calibri" pitchFamily="34" charset="-122"/>
-                <a:cs typeface="Calibri" pitchFamily="34" charset="-120"/>
-              </a:rPr>
               <a:t>AI Identity</a:t>
             </a:r>
             <a:endParaRPr lang="en-US" sz="950" dirty="0"/>
@@ -8671,7 +8693,7 @@
       </p:sp>
       <p:sp>
         <p:nvSpPr>
-          <p:cNvPr id="24" name="Text 22"/>
+          <p:cNvPr id="26" name="Text 24"/>
           <p:cNvSpPr txBox="1"/>
           <p:nvPr/>
         </p:nvSpPr>
